--- a/04-04/04.04-组会报告-刘子豪.pptx
+++ b/04-04/04.04-组会报告-刘子豪.pptx
@@ -4065,7 +4065,7 @@
                 <a:latin typeface="Microsoft YaHei" panose="020B0503020204020204" pitchFamily="34" charset="-122"/>
                 <a:ea typeface="Microsoft YaHei" panose="020B0503020204020204" pitchFamily="34" charset="-122"/>
               </a:rPr>
-              <a:t>—2026</a:t>
+              <a:t>—2026年04月04日—</a:t>
             </a:r>
             <a:r>
               <a:rPr lang="zh-CN" altLang="en-US" b="1" dirty="0">
@@ -4082,7 +4082,7 @@
                 <a:latin typeface="Microsoft YaHei" panose="020B0503020204020204" pitchFamily="34" charset="-122"/>
                 <a:ea typeface="Microsoft YaHei" panose="020B0503020204020204" pitchFamily="34" charset="-122"/>
               </a:rPr>
-              <a:t>年</a:t>
+              <a:t/>
             </a:r>
             <a:r>
               <a:rPr lang="en-US" altLang="zh-CN" b="1" dirty="0">
@@ -4099,7 +4099,7 @@
                 <a:latin typeface="Microsoft YaHei" panose="020B0503020204020204" pitchFamily="34" charset="-122"/>
                 <a:ea typeface="Microsoft YaHei" panose="020B0503020204020204" pitchFamily="34" charset="-122"/>
               </a:rPr>
-              <a:t>04</a:t>
+              <a:t/>
             </a:r>
             <a:r>
               <a:rPr lang="zh-CN" altLang="en-US" b="1" dirty="0">
@@ -4116,7 +4116,7 @@
                 <a:latin typeface="Microsoft YaHei" panose="020B0503020204020204" pitchFamily="34" charset="-122"/>
                 <a:ea typeface="Microsoft YaHei" panose="020B0503020204020204" pitchFamily="34" charset="-122"/>
               </a:rPr>
-              <a:t>月</a:t>
+              <a:t/>
             </a:r>
             <a:r>
               <a:rPr lang="en-US" altLang="zh-CN" b="1" dirty="0">
@@ -4133,7 +4133,7 @@
                 <a:latin typeface="Microsoft YaHei" panose="020B0503020204020204" pitchFamily="34" charset="-122"/>
                 <a:ea typeface="Microsoft YaHei" panose="020B0503020204020204" pitchFamily="34" charset="-122"/>
               </a:rPr>
-              <a:t>04</a:t>
+              <a:t/>
             </a:r>
             <a:r>
               <a:rPr lang="zh-CN" altLang="en-US" b="1" dirty="0">
@@ -4150,7 +4150,7 @@
                 <a:latin typeface="Microsoft YaHei" panose="020B0503020204020204" pitchFamily="34" charset="-122"/>
                 <a:ea typeface="Microsoft YaHei" panose="020B0503020204020204" pitchFamily="34" charset="-122"/>
               </a:rPr>
-              <a:t>日</a:t>
+              <a:t/>
             </a:r>
             <a:r>
               <a:rPr lang="en-US" altLang="zh-CN" b="1" dirty="0">
@@ -4167,7 +4167,7 @@
                 <a:latin typeface="Microsoft YaHei" panose="020B0503020204020204" pitchFamily="34" charset="-122"/>
                 <a:ea typeface="Microsoft YaHei" panose="020B0503020204020204" pitchFamily="34" charset="-122"/>
               </a:rPr>
-              <a:t>—</a:t>
+              <a:t/>
             </a:r>
             <a:endParaRPr lang="zh-CN" altLang="en-US" dirty="0"/>
           </a:p>
